--- a/Apresentação One Time Passwords.pptx
+++ b/Apresentação One Time Passwords.pptx
@@ -896,8 +896,8 @@
         </p:nvSpPr>
         <p:spPr>
           <a:xfrm>
-            <a:off x="1143225" y="685800"/>
-            <a:ext cx="4572225" cy="3429000"/>
+            <a:off x="381000" y="685800"/>
+            <a:ext cx="6096000" cy="3429000"/>
           </a:xfrm>
           <a:custGeom>
             <a:avLst/>
@@ -1000,8 +1000,8 @@
         </p:nvSpPr>
         <p:spPr>
           <a:xfrm>
-            <a:off x="1143225" y="685800"/>
-            <a:ext cx="4572225" cy="3429000"/>
+            <a:off x="381000" y="685800"/>
+            <a:ext cx="6096000" cy="3429000"/>
           </a:xfrm>
           <a:custGeom>
             <a:avLst/>
@@ -1416,8 +1416,8 @@
         </p:nvSpPr>
         <p:spPr>
           <a:xfrm>
-            <a:off x="1143225" y="685800"/>
-            <a:ext cx="4572225" cy="3429000"/>
+            <a:off x="381000" y="685800"/>
+            <a:ext cx="6096000" cy="3429000"/>
           </a:xfrm>
           <a:custGeom>
             <a:avLst/>
@@ -1520,8 +1520,8 @@
         </p:nvSpPr>
         <p:spPr>
           <a:xfrm>
-            <a:off x="1143225" y="685800"/>
-            <a:ext cx="4572225" cy="3429000"/>
+            <a:off x="381000" y="685800"/>
+            <a:ext cx="6096000" cy="3429000"/>
           </a:xfrm>
           <a:custGeom>
             <a:avLst/>
@@ -1624,8 +1624,8 @@
         </p:nvSpPr>
         <p:spPr>
           <a:xfrm>
-            <a:off x="1143225" y="685800"/>
-            <a:ext cx="4572225" cy="3429000"/>
+            <a:off x="381000" y="685800"/>
+            <a:ext cx="6096000" cy="3429000"/>
           </a:xfrm>
           <a:custGeom>
             <a:avLst/>
@@ -1728,8 +1728,8 @@
         </p:nvSpPr>
         <p:spPr>
           <a:xfrm>
-            <a:off x="1143225" y="685800"/>
-            <a:ext cx="4572225" cy="3429000"/>
+            <a:off x="381000" y="685800"/>
+            <a:ext cx="6096000" cy="3429000"/>
           </a:xfrm>
           <a:custGeom>
             <a:avLst/>
@@ -1832,8 +1832,8 @@
         </p:nvSpPr>
         <p:spPr>
           <a:xfrm>
-            <a:off x="1143225" y="685800"/>
-            <a:ext cx="4572225" cy="3429000"/>
+            <a:off x="381000" y="685800"/>
+            <a:ext cx="6096000" cy="3429000"/>
           </a:xfrm>
           <a:custGeom>
             <a:avLst/>
@@ -1936,8 +1936,8 @@
         </p:nvSpPr>
         <p:spPr>
           <a:xfrm>
-            <a:off x="1143225" y="685800"/>
-            <a:ext cx="4572225" cy="3429000"/>
+            <a:off x="381000" y="685800"/>
+            <a:ext cx="6096000" cy="3429000"/>
           </a:xfrm>
           <a:custGeom>
             <a:avLst/>
@@ -2040,8 +2040,8 @@
         </p:nvSpPr>
         <p:spPr>
           <a:xfrm>
-            <a:off x="1143225" y="685800"/>
-            <a:ext cx="4572225" cy="3429000"/>
+            <a:off x="381000" y="685800"/>
+            <a:ext cx="6096000" cy="3429000"/>
           </a:xfrm>
           <a:custGeom>
             <a:avLst/>
@@ -11944,6 +11944,39 @@
           </a:ln>
         </p:spPr>
       </p:pic>
+      <p:pic>
+        <p:nvPicPr>
+          <p:cNvPr id="2" name="Google Shape;278;p25" descr="image.png">
+            <a:extLst>
+              <a:ext uri="{FF2B5EF4-FFF2-40B4-BE49-F238E27FC236}">
+                <a16:creationId xmlns:a16="http://schemas.microsoft.com/office/drawing/2014/main" id="{14A2D07C-58D9-87FA-CD37-FD4394B1A247}"/>
+              </a:ext>
+            </a:extLst>
+          </p:cNvPr>
+          <p:cNvPicPr preferRelativeResize="0"/>
+          <p:nvPr/>
+        </p:nvPicPr>
+        <p:blipFill rotWithShape="1">
+          <a:blip r:embed="rId3">
+            <a:alphaModFix/>
+          </a:blip>
+          <a:srcRect/>
+          <a:stretch/>
+        </p:blipFill>
+        <p:spPr>
+          <a:xfrm>
+            <a:off x="-80925" y="-102412"/>
+            <a:ext cx="12556150" cy="7062826"/>
+          </a:xfrm>
+          <a:prstGeom prst="rect">
+            <a:avLst/>
+          </a:prstGeom>
+          <a:noFill/>
+          <a:ln>
+            <a:noFill/>
+          </a:ln>
+        </p:spPr>
+      </p:pic>
       <p:sp>
         <p:nvSpPr>
           <p:cNvPr id="85" name="Google Shape;85;p13"/>
@@ -12591,6 +12624,39 @@
           <a:xfrm>
             <a:off x="0" y="0"/>
             <a:ext cx="12192000" cy="6858000"/>
+          </a:xfrm>
+          <a:prstGeom prst="rect">
+            <a:avLst/>
+          </a:prstGeom>
+          <a:noFill/>
+          <a:ln>
+            <a:noFill/>
+          </a:ln>
+        </p:spPr>
+      </p:pic>
+      <p:pic>
+        <p:nvPicPr>
+          <p:cNvPr id="2" name="Google Shape;278;p25" descr="image.png">
+            <a:extLst>
+              <a:ext uri="{FF2B5EF4-FFF2-40B4-BE49-F238E27FC236}">
+                <a16:creationId xmlns:a16="http://schemas.microsoft.com/office/drawing/2014/main" id="{BCDE4229-96B8-16C7-A8E0-679EDFBF50DF}"/>
+              </a:ext>
+            </a:extLst>
+          </p:cNvPr>
+          <p:cNvPicPr preferRelativeResize="0"/>
+          <p:nvPr/>
+        </p:nvPicPr>
+        <p:blipFill rotWithShape="1">
+          <a:blip r:embed="rId3">
+            <a:alphaModFix/>
+          </a:blip>
+          <a:srcRect/>
+          <a:stretch/>
+        </p:blipFill>
+        <p:spPr>
+          <a:xfrm>
+            <a:off x="-80925" y="-102412"/>
+            <a:ext cx="12556150" cy="7062826"/>
           </a:xfrm>
           <a:prstGeom prst="rect">
             <a:avLst/>
@@ -13176,6 +13242,39 @@
       </p:pic>
       <p:pic>
         <p:nvPicPr>
+          <p:cNvPr id="2" name="Google Shape;278;p25" descr="image.png">
+            <a:extLst>
+              <a:ext uri="{FF2B5EF4-FFF2-40B4-BE49-F238E27FC236}">
+                <a16:creationId xmlns:a16="http://schemas.microsoft.com/office/drawing/2014/main" id="{B530C4DE-4691-BB8D-70FB-15A3F32787A0}"/>
+              </a:ext>
+            </a:extLst>
+          </p:cNvPr>
+          <p:cNvPicPr preferRelativeResize="0"/>
+          <p:nvPr/>
+        </p:nvPicPr>
+        <p:blipFill rotWithShape="1">
+          <a:blip r:embed="rId3">
+            <a:alphaModFix/>
+          </a:blip>
+          <a:srcRect/>
+          <a:stretch/>
+        </p:blipFill>
+        <p:spPr>
+          <a:xfrm>
+            <a:off x="-80925" y="-102412"/>
+            <a:ext cx="12556150" cy="7062826"/>
+          </a:xfrm>
+          <a:prstGeom prst="rect">
+            <a:avLst/>
+          </a:prstGeom>
+          <a:noFill/>
+          <a:ln>
+            <a:noFill/>
+          </a:ln>
+        </p:spPr>
+      </p:pic>
+      <p:pic>
+        <p:nvPicPr>
           <p:cNvPr id="257" name="Google Shape;257;p23" descr="image.png"/>
           <p:cNvPicPr preferRelativeResize="0"/>
           <p:nvPr/>
@@ -13473,7 +13572,7 @@
         <p:spPr>
           <a:xfrm>
             <a:off x="771525" y="581025"/>
-            <a:ext cx="11381422" cy="439935"/>
+            <a:ext cx="11381422" cy="533223"/>
           </a:xfrm>
           <a:prstGeom prst="rect">
             <a:avLst/>
@@ -13502,7 +13601,7 @@
               <a:buNone/>
             </a:pPr>
             <a:r>
-              <a:rPr lang="en-US" sz="3150" b="1" i="0" u="none" strike="noStrike" cap="none">
+              <a:rPr lang="en-US" sz="3150" b="1" i="0" u="none" strike="noStrike" cap="none" dirty="0">
                 <a:solidFill>
                   <a:srgbClr val="F8FAFC"/>
                 </a:solidFill>
@@ -13511,9 +13610,9 @@
                 <a:cs typeface="Space Grotesk"/>
                 <a:sym typeface="Space Grotesk"/>
               </a:rPr>
-              <a:t>O Futuro: Passwordless</a:t>
+              <a:t>O Futuro</a:t>
             </a:r>
-            <a:endParaRPr/>
+            <a:endParaRPr dirty="0"/>
           </a:p>
         </p:txBody>
       </p:sp>
@@ -14807,6 +14906,39 @@
       </p:pic>
       <p:pic>
         <p:nvPicPr>
+          <p:cNvPr id="2" name="Google Shape;278;p25" descr="image.png">
+            <a:extLst>
+              <a:ext uri="{FF2B5EF4-FFF2-40B4-BE49-F238E27FC236}">
+                <a16:creationId xmlns:a16="http://schemas.microsoft.com/office/drawing/2014/main" id="{46D5219F-5407-9B36-B59B-7324384A487A}"/>
+              </a:ext>
+            </a:extLst>
+          </p:cNvPr>
+          <p:cNvPicPr preferRelativeResize="0"/>
+          <p:nvPr/>
+        </p:nvPicPr>
+        <p:blipFill rotWithShape="1">
+          <a:blip r:embed="rId3">
+            <a:alphaModFix/>
+          </a:blip>
+          <a:srcRect/>
+          <a:stretch/>
+        </p:blipFill>
+        <p:spPr>
+          <a:xfrm>
+            <a:off x="-80925" y="-102412"/>
+            <a:ext cx="12556150" cy="7062826"/>
+          </a:xfrm>
+          <a:prstGeom prst="rect">
+            <a:avLst/>
+          </a:prstGeom>
+          <a:noFill/>
+          <a:ln>
+            <a:noFill/>
+          </a:ln>
+        </p:spPr>
+      </p:pic>
+      <p:pic>
+        <p:nvPicPr>
           <p:cNvPr id="100" name="Google Shape;100;p14" descr="image.png"/>
           <p:cNvPicPr preferRelativeResize="0"/>
           <p:nvPr/>
@@ -16062,6 +16194,39 @@
       </p:pic>
       <p:pic>
         <p:nvPicPr>
+          <p:cNvPr id="2" name="Google Shape;278;p25" descr="image.png">
+            <a:extLst>
+              <a:ext uri="{FF2B5EF4-FFF2-40B4-BE49-F238E27FC236}">
+                <a16:creationId xmlns:a16="http://schemas.microsoft.com/office/drawing/2014/main" id="{220EA920-0C6C-9978-871E-0A70B6F729E7}"/>
+              </a:ext>
+            </a:extLst>
+          </p:cNvPr>
+          <p:cNvPicPr preferRelativeResize="0"/>
+          <p:nvPr/>
+        </p:nvPicPr>
+        <p:blipFill rotWithShape="1">
+          <a:blip r:embed="rId3">
+            <a:alphaModFix/>
+          </a:blip>
+          <a:srcRect/>
+          <a:stretch/>
+        </p:blipFill>
+        <p:spPr>
+          <a:xfrm>
+            <a:off x="-80925" y="-102412"/>
+            <a:ext cx="12556150" cy="7062826"/>
+          </a:xfrm>
+          <a:prstGeom prst="rect">
+            <a:avLst/>
+          </a:prstGeom>
+          <a:noFill/>
+          <a:ln>
+            <a:noFill/>
+          </a:ln>
+        </p:spPr>
+      </p:pic>
+      <p:pic>
+        <p:nvPicPr>
           <p:cNvPr id="115" name="Google Shape;115;p15" descr="image.png"/>
           <p:cNvPicPr preferRelativeResize="0"/>
           <p:nvPr/>
@@ -16598,6 +16763,39 @@
       </p:pic>
       <p:pic>
         <p:nvPicPr>
+          <p:cNvPr id="2" name="Google Shape;278;p25" descr="image.png">
+            <a:extLst>
+              <a:ext uri="{FF2B5EF4-FFF2-40B4-BE49-F238E27FC236}">
+                <a16:creationId xmlns:a16="http://schemas.microsoft.com/office/drawing/2014/main" id="{7F248A15-9981-6AA7-5E75-D6CBF8E72310}"/>
+              </a:ext>
+            </a:extLst>
+          </p:cNvPr>
+          <p:cNvPicPr preferRelativeResize="0"/>
+          <p:nvPr/>
+        </p:nvPicPr>
+        <p:blipFill rotWithShape="1">
+          <a:blip r:embed="rId3">
+            <a:alphaModFix/>
+          </a:blip>
+          <a:srcRect/>
+          <a:stretch/>
+        </p:blipFill>
+        <p:spPr>
+          <a:xfrm>
+            <a:off x="-80925" y="-102412"/>
+            <a:ext cx="12556150" cy="7062826"/>
+          </a:xfrm>
+          <a:prstGeom prst="rect">
+            <a:avLst/>
+          </a:prstGeom>
+          <a:noFill/>
+          <a:ln>
+            <a:noFill/>
+          </a:ln>
+        </p:spPr>
+      </p:pic>
+      <p:pic>
+        <p:nvPicPr>
           <p:cNvPr id="131" name="Google Shape;131;p16" descr="image.png"/>
           <p:cNvPicPr preferRelativeResize="0"/>
           <p:nvPr/>
@@ -17279,6 +17477,39 @@
       </p:pic>
       <p:pic>
         <p:nvPicPr>
+          <p:cNvPr id="2" name="Google Shape;278;p25" descr="image.png">
+            <a:extLst>
+              <a:ext uri="{FF2B5EF4-FFF2-40B4-BE49-F238E27FC236}">
+                <a16:creationId xmlns:a16="http://schemas.microsoft.com/office/drawing/2014/main" id="{4F2FAEA3-879C-8305-1DA7-BAA01844C4FE}"/>
+              </a:ext>
+            </a:extLst>
+          </p:cNvPr>
+          <p:cNvPicPr preferRelativeResize="0"/>
+          <p:nvPr/>
+        </p:nvPicPr>
+        <p:blipFill rotWithShape="1">
+          <a:blip r:embed="rId3">
+            <a:alphaModFix/>
+          </a:blip>
+          <a:srcRect/>
+          <a:stretch/>
+        </p:blipFill>
+        <p:spPr>
+          <a:xfrm>
+            <a:off x="-80925" y="-102412"/>
+            <a:ext cx="12556150" cy="7062826"/>
+          </a:xfrm>
+          <a:prstGeom prst="rect">
+            <a:avLst/>
+          </a:prstGeom>
+          <a:noFill/>
+          <a:ln>
+            <a:noFill/>
+          </a:ln>
+        </p:spPr>
+      </p:pic>
+      <p:pic>
+        <p:nvPicPr>
           <p:cNvPr id="150" name="Google Shape;150;p17" descr="image.png"/>
           <p:cNvPicPr preferRelativeResize="0"/>
           <p:nvPr/>
@@ -18467,6 +18698,39 @@
       </p:pic>
       <p:pic>
         <p:nvPicPr>
+          <p:cNvPr id="2" name="Google Shape;278;p25" descr="image.png">
+            <a:extLst>
+              <a:ext uri="{FF2B5EF4-FFF2-40B4-BE49-F238E27FC236}">
+                <a16:creationId xmlns:a16="http://schemas.microsoft.com/office/drawing/2014/main" id="{98EEA8CE-17D7-D948-4F57-BD6782F432EA}"/>
+              </a:ext>
+            </a:extLst>
+          </p:cNvPr>
+          <p:cNvPicPr preferRelativeResize="0"/>
+          <p:nvPr/>
+        </p:nvPicPr>
+        <p:blipFill rotWithShape="1">
+          <a:blip r:embed="rId3">
+            <a:alphaModFix/>
+          </a:blip>
+          <a:srcRect/>
+          <a:stretch/>
+        </p:blipFill>
+        <p:spPr>
+          <a:xfrm>
+            <a:off x="-80925" y="-102412"/>
+            <a:ext cx="12556150" cy="7062826"/>
+          </a:xfrm>
+          <a:prstGeom prst="rect">
+            <a:avLst/>
+          </a:prstGeom>
+          <a:noFill/>
+          <a:ln>
+            <a:noFill/>
+          </a:ln>
+        </p:spPr>
+      </p:pic>
+      <p:pic>
+        <p:nvPicPr>
           <p:cNvPr id="177" name="Google Shape;177;p18" descr="image.png"/>
           <p:cNvPicPr preferRelativeResize="0"/>
           <p:nvPr/>
@@ -19140,6 +19404,39 @@
       </p:pic>
       <p:pic>
         <p:nvPicPr>
+          <p:cNvPr id="2" name="Google Shape;278;p25" descr="image.png">
+            <a:extLst>
+              <a:ext uri="{FF2B5EF4-FFF2-40B4-BE49-F238E27FC236}">
+                <a16:creationId xmlns:a16="http://schemas.microsoft.com/office/drawing/2014/main" id="{3E1DA7A2-5D91-22DE-9972-70402A278466}"/>
+              </a:ext>
+            </a:extLst>
+          </p:cNvPr>
+          <p:cNvPicPr preferRelativeResize="0"/>
+          <p:nvPr/>
+        </p:nvPicPr>
+        <p:blipFill rotWithShape="1">
+          <a:blip r:embed="rId3">
+            <a:alphaModFix/>
+          </a:blip>
+          <a:srcRect/>
+          <a:stretch/>
+        </p:blipFill>
+        <p:spPr>
+          <a:xfrm>
+            <a:off x="-80925" y="-102412"/>
+            <a:ext cx="12556150" cy="7062826"/>
+          </a:xfrm>
+          <a:prstGeom prst="rect">
+            <a:avLst/>
+          </a:prstGeom>
+          <a:noFill/>
+          <a:ln>
+            <a:noFill/>
+          </a:ln>
+        </p:spPr>
+      </p:pic>
+      <p:pic>
+        <p:nvPicPr>
           <p:cNvPr id="194" name="Google Shape;194;p19" descr="image.png"/>
           <p:cNvPicPr preferRelativeResize="0"/>
           <p:nvPr/>
@@ -19791,6 +20088,39 @@
       </p:pic>
       <p:pic>
         <p:nvPicPr>
+          <p:cNvPr id="2" name="Google Shape;278;p25" descr="image.png">
+            <a:extLst>
+              <a:ext uri="{FF2B5EF4-FFF2-40B4-BE49-F238E27FC236}">
+                <a16:creationId xmlns:a16="http://schemas.microsoft.com/office/drawing/2014/main" id="{220B3C8D-5632-232F-E9BF-E7BC1D6A3E19}"/>
+              </a:ext>
+            </a:extLst>
+          </p:cNvPr>
+          <p:cNvPicPr preferRelativeResize="0"/>
+          <p:nvPr/>
+        </p:nvPicPr>
+        <p:blipFill rotWithShape="1">
+          <a:blip r:embed="rId3">
+            <a:alphaModFix/>
+          </a:blip>
+          <a:srcRect/>
+          <a:stretch/>
+        </p:blipFill>
+        <p:spPr>
+          <a:xfrm>
+            <a:off x="-80925" y="-102412"/>
+            <a:ext cx="12556150" cy="7062826"/>
+          </a:xfrm>
+          <a:prstGeom prst="rect">
+            <a:avLst/>
+          </a:prstGeom>
+          <a:noFill/>
+          <a:ln>
+            <a:noFill/>
+          </a:ln>
+        </p:spPr>
+      </p:pic>
+      <p:pic>
+        <p:nvPicPr>
           <p:cNvPr id="211" name="Google Shape;211;p20" descr="image.png"/>
           <p:cNvPicPr preferRelativeResize="0"/>
           <p:nvPr/>
@@ -20423,6 +20753,39 @@
           <a:xfrm>
             <a:off x="0" y="0"/>
             <a:ext cx="12192000" cy="6858000"/>
+          </a:xfrm>
+          <a:prstGeom prst="rect">
+            <a:avLst/>
+          </a:prstGeom>
+          <a:noFill/>
+          <a:ln>
+            <a:noFill/>
+          </a:ln>
+        </p:spPr>
+      </p:pic>
+      <p:pic>
+        <p:nvPicPr>
+          <p:cNvPr id="2" name="Google Shape;278;p25" descr="image.png">
+            <a:extLst>
+              <a:ext uri="{FF2B5EF4-FFF2-40B4-BE49-F238E27FC236}">
+                <a16:creationId xmlns:a16="http://schemas.microsoft.com/office/drawing/2014/main" id="{E0117530-DF5F-C43E-986E-FA761BDABBD4}"/>
+              </a:ext>
+            </a:extLst>
+          </p:cNvPr>
+          <p:cNvPicPr preferRelativeResize="0"/>
+          <p:nvPr/>
+        </p:nvPicPr>
+        <p:blipFill rotWithShape="1">
+          <a:blip r:embed="rId3">
+            <a:alphaModFix/>
+          </a:blip>
+          <a:srcRect/>
+          <a:stretch/>
+        </p:blipFill>
+        <p:spPr>
+          <a:xfrm>
+            <a:off x="-80925" y="-102412"/>
+            <a:ext cx="12556150" cy="7062826"/>
           </a:xfrm>
           <a:prstGeom prst="rect">
             <a:avLst/>

--- a/Apresentação One Time Passwords.pptx
+++ b/Apresentação One Time Passwords.pptx
@@ -5,7 +5,7 @@
     <p:sldMasterId id="2147483659" r:id="rId1"/>
   </p:sldMasterIdLst>
   <p:notesMasterIdLst>
-    <p:notesMasterId r:id="rId15"/>
+    <p:notesMasterId r:id="rId14"/>
   </p:notesMasterIdLst>
   <p:sldIdLst>
     <p:sldId id="256" r:id="rId2"/>
@@ -20,20 +20,19 @@
     <p:sldId id="265" r:id="rId11"/>
     <p:sldId id="266" r:id="rId12"/>
     <p:sldId id="267" r:id="rId13"/>
-    <p:sldId id="268" r:id="rId14"/>
   </p:sldIdLst>
   <p:sldSz cx="12192000" cy="6858000"/>
   <p:notesSz cx="6858000" cy="9144000"/>
   <p:embeddedFontLst>
     <p:embeddedFont>
       <p:font typeface="Outfit" panose="020B0604020202020204" charset="0"/>
-      <p:regular r:id="rId16"/>
-      <p:bold r:id="rId17"/>
+      <p:regular r:id="rId15"/>
+      <p:bold r:id="rId16"/>
     </p:embeddedFont>
     <p:embeddedFont>
       <p:font typeface="Space Grotesk" panose="020B0604020202020204" charset="0"/>
-      <p:regular r:id="rId18"/>
-      <p:bold r:id="rId19"/>
+      <p:regular r:id="rId17"/>
+      <p:bold r:id="rId18"/>
     </p:embeddedFont>
   </p:embeddedFontLst>
   <p:defaultTextStyle>
@@ -1095,110 +1094,6 @@
       <p:sp>
         <p:nvSpPr>
           <p:cNvPr id="267" name="Google Shape;267;p12:notes"/>
-          <p:cNvSpPr>
-            <a:spLocks noGrp="1" noRot="1" noChangeAspect="1"/>
-          </p:cNvSpPr>
-          <p:nvPr>
-            <p:ph type="sldImg" idx="2"/>
-          </p:nvPr>
-        </p:nvSpPr>
-        <p:spPr>
-          <a:xfrm>
-            <a:off x="381000" y="685800"/>
-            <a:ext cx="6096000" cy="3429000"/>
-          </a:xfrm>
-          <a:custGeom>
-            <a:avLst/>
-            <a:gdLst/>
-            <a:ahLst/>
-            <a:cxnLst/>
-            <a:rect l="l" t="t" r="r" b="b"/>
-            <a:pathLst>
-              <a:path w="120000" h="120000" extrusionOk="0">
-                <a:moveTo>
-                  <a:pt x="0" y="0"/>
-                </a:moveTo>
-                <a:lnTo>
-                  <a:pt x="120000" y="0"/>
-                </a:lnTo>
-                <a:lnTo>
-                  <a:pt x="120000" y="120000"/>
-                </a:lnTo>
-                <a:lnTo>
-                  <a:pt x="0" y="120000"/>
-                </a:lnTo>
-                <a:close/>
-              </a:path>
-            </a:pathLst>
-          </a:custGeom>
-        </p:spPr>
-      </p:sp>
-    </p:spTree>
-  </p:cSld>
-  <p:clrMapOvr>
-    <a:masterClrMapping/>
-  </p:clrMapOvr>
-</p:notes>
-</file>
-
-<file path=ppt/notesSlides/notesSlide13.xml><?xml version="1.0" encoding="utf-8"?>
-<p:notes xmlns:a="http://schemas.openxmlformats.org/drawingml/2006/main" xmlns:r="http://schemas.openxmlformats.org/officeDocument/2006/relationships" xmlns:p="http://schemas.openxmlformats.org/presentationml/2006/main" showMasterSp="0" showMasterPhAnim="0">
-  <p:cSld>
-    <p:spTree>
-      <p:nvGrpSpPr>
-        <p:cNvPr id="1" name="Shape 274"/>
-        <p:cNvGrpSpPr/>
-        <p:nvPr/>
-      </p:nvGrpSpPr>
-      <p:grpSpPr>
-        <a:xfrm>
-          <a:off x="0" y="0"/>
-          <a:ext cx="0" cy="0"/>
-          <a:chOff x="0" y="0"/>
-          <a:chExt cx="0" cy="0"/>
-        </a:xfrm>
-      </p:grpSpPr>
-      <p:sp>
-        <p:nvSpPr>
-          <p:cNvPr id="275" name="Google Shape;275;p13:notes"/>
-          <p:cNvSpPr txBox="1">
-            <a:spLocks noGrp="1"/>
-          </p:cNvSpPr>
-          <p:nvPr>
-            <p:ph type="body" idx="1"/>
-          </p:nvPr>
-        </p:nvSpPr>
-        <p:spPr>
-          <a:xfrm>
-            <a:off x="685800" y="4343400"/>
-            <a:ext cx="5486400" cy="4114800"/>
-          </a:xfrm>
-          <a:prstGeom prst="rect">
-            <a:avLst/>
-          </a:prstGeom>
-        </p:spPr>
-        <p:txBody>
-          <a:bodyPr spcFirstLastPara="1" wrap="square" lIns="91425" tIns="91425" rIns="91425" bIns="91425" anchor="t" anchorCtr="0">
-            <a:noAutofit/>
-          </a:bodyPr>
-          <a:lstStyle/>
-          <a:p>
-            <a:pPr marL="0" lvl="0" indent="0" algn="l" rtl="0">
-              <a:spcBef>
-                <a:spcPts val="0"/>
-              </a:spcBef>
-              <a:spcAft>
-                <a:spcPts val="0"/>
-              </a:spcAft>
-              <a:buNone/>
-            </a:pPr>
-            <a:endParaRPr/>
-          </a:p>
-        </p:txBody>
-      </p:sp>
-      <p:sp>
-        <p:nvSpPr>
-          <p:cNvPr id="276" name="Google Shape;276;p13:notes"/>
           <p:cNvSpPr>
             <a:spLocks noGrp="1" noRot="1" noChangeAspect="1"/>
           </p:cNvSpPr>
@@ -12185,7 +12080,7 @@
               </a:rPr>
               <a:t> </a:t>
             </a:r>
-            <a:endParaRPr dirty="0"/>
+            <a:endParaRPr lang="en-US" dirty="0"/>
           </a:p>
         </p:txBody>
       </p:sp>
@@ -13988,878 +13883,6 @@
 </p:sld>
 </file>
 
-<file path=ppt/slides/slide13.xml><?xml version="1.0" encoding="utf-8"?>
-<p:sld xmlns:a="http://schemas.openxmlformats.org/drawingml/2006/main" xmlns:r="http://schemas.openxmlformats.org/officeDocument/2006/relationships" xmlns:p="http://schemas.openxmlformats.org/presentationml/2006/main">
-  <p:cSld>
-    <p:spTree>
-      <p:nvGrpSpPr>
-        <p:cNvPr id="1" name="Shape 277"/>
-        <p:cNvGrpSpPr/>
-        <p:nvPr/>
-      </p:nvGrpSpPr>
-      <p:grpSpPr>
-        <a:xfrm>
-          <a:off x="0" y="0"/>
-          <a:ext cx="0" cy="0"/>
-          <a:chOff x="0" y="0"/>
-          <a:chExt cx="0" cy="0"/>
-        </a:xfrm>
-      </p:grpSpPr>
-      <p:pic>
-        <p:nvPicPr>
-          <p:cNvPr id="278" name="Google Shape;278;p25" descr="image.png"/>
-          <p:cNvPicPr preferRelativeResize="0"/>
-          <p:nvPr/>
-        </p:nvPicPr>
-        <p:blipFill rotWithShape="1">
-          <a:blip r:embed="rId3">
-            <a:alphaModFix/>
-          </a:blip>
-          <a:srcRect/>
-          <a:stretch/>
-        </p:blipFill>
-        <p:spPr>
-          <a:xfrm>
-            <a:off x="-80925" y="-102412"/>
-            <a:ext cx="12556150" cy="7062826"/>
-          </a:xfrm>
-          <a:prstGeom prst="rect">
-            <a:avLst/>
-          </a:prstGeom>
-          <a:noFill/>
-          <a:ln>
-            <a:noFill/>
-          </a:ln>
-        </p:spPr>
-      </p:pic>
-      <p:sp>
-        <p:nvSpPr>
-          <p:cNvPr id="279" name="Google Shape;279;p25"/>
-          <p:cNvSpPr/>
-          <p:nvPr/>
-        </p:nvSpPr>
-        <p:spPr>
-          <a:xfrm>
-            <a:off x="581025" y="2568029"/>
-            <a:ext cx="11029950" cy="784770"/>
-          </a:xfrm>
-          <a:prstGeom prst="rect">
-            <a:avLst/>
-          </a:prstGeom>
-          <a:noFill/>
-          <a:ln>
-            <a:noFill/>
-          </a:ln>
-        </p:spPr>
-        <p:txBody>
-          <a:bodyPr spcFirstLastPara="1" wrap="square" lIns="91425" tIns="45700" rIns="91425" bIns="45700" anchor="ctr" anchorCtr="0">
-            <a:noAutofit/>
-          </a:bodyPr>
-          <a:lstStyle/>
-          <a:p>
-            <a:pPr marL="0" marR="0" lvl="0" indent="0" algn="ctr" rtl="0">
-              <a:spcBef>
-                <a:spcPts val="0"/>
-              </a:spcBef>
-              <a:spcAft>
-                <a:spcPts val="0"/>
-              </a:spcAft>
-              <a:buNone/>
-            </a:pPr>
-            <a:endParaRPr sz="1800" b="0" i="0" u="none" strike="noStrike" cap="none">
-              <a:solidFill>
-                <a:schemeClr val="dk1"/>
-              </a:solidFill>
-              <a:latin typeface="Calibri"/>
-              <a:ea typeface="Calibri"/>
-              <a:cs typeface="Calibri"/>
-              <a:sym typeface="Calibri"/>
-            </a:endParaRPr>
-          </a:p>
-        </p:txBody>
-      </p:sp>
-      <p:sp>
-        <p:nvSpPr>
-          <p:cNvPr id="280" name="Google Shape;280;p25"/>
-          <p:cNvSpPr/>
-          <p:nvPr/>
-        </p:nvSpPr>
-        <p:spPr>
-          <a:xfrm>
-            <a:off x="581025" y="3352800"/>
-            <a:ext cx="11029950" cy="784770"/>
-          </a:xfrm>
-          <a:prstGeom prst="rect">
-            <a:avLst/>
-          </a:prstGeom>
-          <a:noFill/>
-          <a:ln>
-            <a:noFill/>
-          </a:ln>
-        </p:spPr>
-        <p:txBody>
-          <a:bodyPr spcFirstLastPara="1" wrap="square" lIns="91425" tIns="45700" rIns="91425" bIns="45700" anchor="ctr" anchorCtr="0">
-            <a:noAutofit/>
-          </a:bodyPr>
-          <a:lstStyle/>
-          <a:p>
-            <a:pPr marL="0" marR="0" lvl="0" indent="0" algn="ctr" rtl="0">
-              <a:spcBef>
-                <a:spcPts val="0"/>
-              </a:spcBef>
-              <a:spcAft>
-                <a:spcPts val="0"/>
-              </a:spcAft>
-              <a:buNone/>
-            </a:pPr>
-            <a:endParaRPr sz="1800" b="0" i="0" u="none" strike="noStrike" cap="none">
-              <a:solidFill>
-                <a:schemeClr val="dk1"/>
-              </a:solidFill>
-              <a:latin typeface="Calibri"/>
-              <a:ea typeface="Calibri"/>
-              <a:cs typeface="Calibri"/>
-              <a:sym typeface="Calibri"/>
-            </a:endParaRPr>
-          </a:p>
-        </p:txBody>
-      </p:sp>
-      <p:sp>
-        <p:nvSpPr>
-          <p:cNvPr id="281" name="Google Shape;281;p25"/>
-          <p:cNvSpPr/>
-          <p:nvPr/>
-        </p:nvSpPr>
-        <p:spPr>
-          <a:xfrm>
-            <a:off x="581025" y="3343275"/>
-            <a:ext cx="11029950" cy="9525"/>
-          </a:xfrm>
-          <a:prstGeom prst="rect">
-            <a:avLst/>
-          </a:prstGeom>
-          <a:solidFill>
-            <a:srgbClr val="757575"/>
-          </a:solidFill>
-          <a:ln>
-            <a:noFill/>
-          </a:ln>
-        </p:spPr>
-        <p:txBody>
-          <a:bodyPr spcFirstLastPara="1" wrap="square" lIns="91425" tIns="45700" rIns="91425" bIns="45700" anchor="ctr" anchorCtr="0">
-            <a:noAutofit/>
-          </a:bodyPr>
-          <a:lstStyle/>
-          <a:p>
-            <a:pPr marL="0" marR="0" lvl="0" indent="0" algn="ctr" rtl="0">
-              <a:spcBef>
-                <a:spcPts val="0"/>
-              </a:spcBef>
-              <a:spcAft>
-                <a:spcPts val="0"/>
-              </a:spcAft>
-              <a:buNone/>
-            </a:pPr>
-            <a:endParaRPr sz="1800" b="0" i="0" u="none" strike="noStrike" cap="none">
-              <a:solidFill>
-                <a:schemeClr val="dk1"/>
-              </a:solidFill>
-              <a:latin typeface="Calibri"/>
-              <a:ea typeface="Calibri"/>
-              <a:cs typeface="Calibri"/>
-              <a:sym typeface="Calibri"/>
-            </a:endParaRPr>
-          </a:p>
-        </p:txBody>
-      </p:sp>
-      <p:sp>
-        <p:nvSpPr>
-          <p:cNvPr id="282" name="Google Shape;282;p25"/>
-          <p:cNvSpPr/>
-          <p:nvPr/>
-        </p:nvSpPr>
-        <p:spPr>
-          <a:xfrm>
-            <a:off x="581025" y="3343275"/>
-            <a:ext cx="11029950" cy="9525"/>
-          </a:xfrm>
-          <a:prstGeom prst="rect">
-            <a:avLst/>
-          </a:prstGeom>
-          <a:solidFill>
-            <a:srgbClr val="757575"/>
-          </a:solidFill>
-          <a:ln>
-            <a:noFill/>
-          </a:ln>
-        </p:spPr>
-        <p:txBody>
-          <a:bodyPr spcFirstLastPara="1" wrap="square" lIns="91425" tIns="45700" rIns="91425" bIns="45700" anchor="ctr" anchorCtr="0">
-            <a:noAutofit/>
-          </a:bodyPr>
-          <a:lstStyle/>
-          <a:p>
-            <a:pPr marL="0" marR="0" lvl="0" indent="0" algn="ctr" rtl="0">
-              <a:spcBef>
-                <a:spcPts val="0"/>
-              </a:spcBef>
-              <a:spcAft>
-                <a:spcPts val="0"/>
-              </a:spcAft>
-              <a:buNone/>
-            </a:pPr>
-            <a:endParaRPr sz="1800" b="0" i="0" u="none" strike="noStrike" cap="none">
-              <a:solidFill>
-                <a:schemeClr val="dk1"/>
-              </a:solidFill>
-              <a:latin typeface="Calibri"/>
-              <a:ea typeface="Calibri"/>
-              <a:cs typeface="Calibri"/>
-              <a:sym typeface="Calibri"/>
-            </a:endParaRPr>
-          </a:p>
-        </p:txBody>
-      </p:sp>
-      <p:sp>
-        <p:nvSpPr>
-          <p:cNvPr id="283" name="Google Shape;283;p25"/>
-          <p:cNvSpPr/>
-          <p:nvPr/>
-        </p:nvSpPr>
-        <p:spPr>
-          <a:xfrm>
-            <a:off x="581025" y="4128045"/>
-            <a:ext cx="11029950" cy="9525"/>
-          </a:xfrm>
-          <a:prstGeom prst="rect">
-            <a:avLst/>
-          </a:prstGeom>
-          <a:solidFill>
-            <a:srgbClr val="757575"/>
-          </a:solidFill>
-          <a:ln>
-            <a:noFill/>
-          </a:ln>
-        </p:spPr>
-        <p:txBody>
-          <a:bodyPr spcFirstLastPara="1" wrap="square" lIns="91425" tIns="45700" rIns="91425" bIns="45700" anchor="ctr" anchorCtr="0">
-            <a:noAutofit/>
-          </a:bodyPr>
-          <a:lstStyle/>
-          <a:p>
-            <a:pPr marL="0" marR="0" lvl="0" indent="0" algn="ctr" rtl="0">
-              <a:spcBef>
-                <a:spcPts val="0"/>
-              </a:spcBef>
-              <a:spcAft>
-                <a:spcPts val="0"/>
-              </a:spcAft>
-              <a:buNone/>
-            </a:pPr>
-            <a:endParaRPr sz="1800" b="0" i="0" u="none" strike="noStrike" cap="none">
-              <a:solidFill>
-                <a:schemeClr val="dk1"/>
-              </a:solidFill>
-              <a:latin typeface="Calibri"/>
-              <a:ea typeface="Calibri"/>
-              <a:cs typeface="Calibri"/>
-              <a:sym typeface="Calibri"/>
-            </a:endParaRPr>
-          </a:p>
-        </p:txBody>
-      </p:sp>
-      <p:sp>
-        <p:nvSpPr>
-          <p:cNvPr id="284" name="Google Shape;284;p25"/>
-          <p:cNvSpPr/>
-          <p:nvPr/>
-        </p:nvSpPr>
-        <p:spPr>
-          <a:xfrm>
-            <a:off x="581025" y="4128045"/>
-            <a:ext cx="11029950" cy="9525"/>
-          </a:xfrm>
-          <a:prstGeom prst="rect">
-            <a:avLst/>
-          </a:prstGeom>
-          <a:solidFill>
-            <a:srgbClr val="757575"/>
-          </a:solidFill>
-          <a:ln>
-            <a:noFill/>
-          </a:ln>
-        </p:spPr>
-        <p:txBody>
-          <a:bodyPr spcFirstLastPara="1" wrap="square" lIns="91425" tIns="45700" rIns="91425" bIns="45700" anchor="ctr" anchorCtr="0">
-            <a:noAutofit/>
-          </a:bodyPr>
-          <a:lstStyle/>
-          <a:p>
-            <a:pPr marL="0" marR="0" lvl="0" indent="0" algn="ctr" rtl="0">
-              <a:spcBef>
-                <a:spcPts val="0"/>
-              </a:spcBef>
-              <a:spcAft>
-                <a:spcPts val="0"/>
-              </a:spcAft>
-              <a:buNone/>
-            </a:pPr>
-            <a:endParaRPr sz="1800" b="0" i="0" u="none" strike="noStrike" cap="none">
-              <a:solidFill>
-                <a:schemeClr val="dk1"/>
-              </a:solidFill>
-              <a:latin typeface="Calibri"/>
-              <a:ea typeface="Calibri"/>
-              <a:cs typeface="Calibri"/>
-              <a:sym typeface="Calibri"/>
-            </a:endParaRPr>
-          </a:p>
-        </p:txBody>
-      </p:sp>
-      <p:pic>
-        <p:nvPicPr>
-          <p:cNvPr id="285" name="Google Shape;285;p25" descr="image.png"/>
-          <p:cNvPicPr preferRelativeResize="0"/>
-          <p:nvPr/>
-        </p:nvPicPr>
-        <p:blipFill rotWithShape="1">
-          <a:blip r:embed="rId4">
-            <a:alphaModFix/>
-          </a:blip>
-          <a:srcRect/>
-          <a:stretch/>
-        </p:blipFill>
-        <p:spPr>
-          <a:xfrm>
-            <a:off x="581025" y="2717452"/>
-            <a:ext cx="857250" cy="476250"/>
-          </a:xfrm>
-          <a:prstGeom prst="rect">
-            <a:avLst/>
-          </a:prstGeom>
-          <a:noFill/>
-          <a:ln>
-            <a:noFill/>
-          </a:ln>
-        </p:spPr>
-      </p:pic>
-      <p:sp>
-        <p:nvSpPr>
-          <p:cNvPr id="286" name="Google Shape;286;p25"/>
-          <p:cNvSpPr txBox="1"/>
-          <p:nvPr/>
-        </p:nvSpPr>
-        <p:spPr>
-          <a:xfrm>
-            <a:off x="1676400" y="2710904"/>
-            <a:ext cx="9934575" cy="198090"/>
-          </a:xfrm>
-          <a:prstGeom prst="rect">
-            <a:avLst/>
-          </a:prstGeom>
-          <a:noFill/>
-          <a:ln>
-            <a:noFill/>
-          </a:ln>
-        </p:spPr>
-        <p:txBody>
-          <a:bodyPr spcFirstLastPara="1" wrap="square" lIns="0" tIns="0" rIns="0" bIns="0" anchor="t" anchorCtr="0">
-            <a:spAutoFit/>
-          </a:bodyPr>
-          <a:lstStyle/>
-          <a:p>
-            <a:pPr marL="0" marR="0" lvl="0" indent="0" algn="l" rtl="0">
-              <a:lnSpc>
-                <a:spcPct val="160000"/>
-              </a:lnSpc>
-              <a:spcBef>
-                <a:spcPts val="0"/>
-              </a:spcBef>
-              <a:spcAft>
-                <a:spcPts val="0"/>
-              </a:spcAft>
-              <a:buNone/>
-            </a:pPr>
-            <a:r>
-              <a:rPr lang="en-US" sz="975" b="0" i="0" u="none" strike="noStrike" cap="none">
-                <a:solidFill>
-                  <a:srgbClr val="CBD5E1"/>
-                </a:solidFill>
-                <a:latin typeface="Outfit"/>
-                <a:ea typeface="Outfit"/>
-                <a:cs typeface="Outfit"/>
-                <a:sym typeface="Outfit"/>
-              </a:rPr>
-              <a:t>https://iosxpert.biz/wp-content/uploads/2023/01/Two-Factor-Authentication@2x-1-1024x592.png.webp</a:t>
-            </a:r>
-            <a:endParaRPr/>
-          </a:p>
-        </p:txBody>
-      </p:sp>
-      <p:sp>
-        <p:nvSpPr>
-          <p:cNvPr id="287" name="Google Shape;287;p25"/>
-          <p:cNvSpPr txBox="1"/>
-          <p:nvPr/>
-        </p:nvSpPr>
-        <p:spPr>
-          <a:xfrm>
-            <a:off x="1676400" y="2956619"/>
-            <a:ext cx="9934575" cy="243780"/>
-          </a:xfrm>
-          <a:prstGeom prst="rect">
-            <a:avLst/>
-          </a:prstGeom>
-          <a:noFill/>
-          <a:ln>
-            <a:noFill/>
-          </a:ln>
-        </p:spPr>
-        <p:txBody>
-          <a:bodyPr spcFirstLastPara="1" wrap="square" lIns="0" tIns="0" rIns="0" bIns="0" anchor="t" anchorCtr="0">
-            <a:spAutoFit/>
-          </a:bodyPr>
-          <a:lstStyle/>
-          <a:p>
-            <a:pPr marL="0" marR="0" lvl="0" indent="0" algn="l" rtl="0">
-              <a:lnSpc>
-                <a:spcPct val="160000"/>
-              </a:lnSpc>
-              <a:spcBef>
-                <a:spcPts val="0"/>
-              </a:spcBef>
-              <a:spcAft>
-                <a:spcPts val="0"/>
-              </a:spcAft>
-              <a:buNone/>
-            </a:pPr>
-            <a:r>
-              <a:rPr lang="en-US" sz="1200" b="0" i="0" u="none" strike="noStrike" cap="none">
-                <a:solidFill>
-                  <a:srgbClr val="CBD5E1"/>
-                </a:solidFill>
-                <a:latin typeface="Outfit"/>
-                <a:ea typeface="Outfit"/>
-                <a:cs typeface="Outfit"/>
-                <a:sym typeface="Outfit"/>
-              </a:rPr>
-              <a:t>Source: </a:t>
-            </a:r>
-            <a:r>
-              <a:rPr lang="en-US" sz="1200" b="0" i="0" u="none" strike="noStrike" cap="none">
-                <a:solidFill>
-                  <a:srgbClr val="4F46E5"/>
-                </a:solidFill>
-                <a:latin typeface="Outfit"/>
-                <a:ea typeface="Outfit"/>
-                <a:cs typeface="Outfit"/>
-                <a:sym typeface="Outfit"/>
-              </a:rPr>
-              <a:t>iosxpert.biz</a:t>
-            </a:r>
-            <a:endParaRPr/>
-          </a:p>
-        </p:txBody>
-      </p:sp>
-      <p:pic>
-        <p:nvPicPr>
-          <p:cNvPr id="288" name="Google Shape;288;p25" descr="image.png"/>
-          <p:cNvPicPr preferRelativeResize="0"/>
-          <p:nvPr/>
-        </p:nvPicPr>
-        <p:blipFill rotWithShape="1">
-          <a:blip r:embed="rId5">
-            <a:alphaModFix/>
-          </a:blip>
-          <a:srcRect/>
-          <a:stretch/>
-        </p:blipFill>
-        <p:spPr>
-          <a:xfrm>
-            <a:off x="581025" y="3502223"/>
-            <a:ext cx="857250" cy="476250"/>
-          </a:xfrm>
-          <a:prstGeom prst="rect">
-            <a:avLst/>
-          </a:prstGeom>
-          <a:noFill/>
-          <a:ln>
-            <a:noFill/>
-          </a:ln>
-        </p:spPr>
-      </p:pic>
-      <p:sp>
-        <p:nvSpPr>
-          <p:cNvPr id="289" name="Google Shape;289;p25"/>
-          <p:cNvSpPr txBox="1"/>
-          <p:nvPr/>
-        </p:nvSpPr>
-        <p:spPr>
-          <a:xfrm>
-            <a:off x="1676400" y="3495675"/>
-            <a:ext cx="9934575" cy="198090"/>
-          </a:xfrm>
-          <a:prstGeom prst="rect">
-            <a:avLst/>
-          </a:prstGeom>
-          <a:noFill/>
-          <a:ln>
-            <a:noFill/>
-          </a:ln>
-        </p:spPr>
-        <p:txBody>
-          <a:bodyPr spcFirstLastPara="1" wrap="square" lIns="0" tIns="0" rIns="0" bIns="0" anchor="t" anchorCtr="0">
-            <a:spAutoFit/>
-          </a:bodyPr>
-          <a:lstStyle/>
-          <a:p>
-            <a:pPr marL="0" marR="0" lvl="0" indent="0" algn="l" rtl="0">
-              <a:lnSpc>
-                <a:spcPct val="160000"/>
-              </a:lnSpc>
-              <a:spcBef>
-                <a:spcPts val="0"/>
-              </a:spcBef>
-              <a:spcAft>
-                <a:spcPts val="0"/>
-              </a:spcAft>
-              <a:buNone/>
-            </a:pPr>
-            <a:r>
-              <a:rPr lang="en-US" sz="975" b="0" i="0" u="none" strike="noStrike" cap="none">
-                <a:solidFill>
-                  <a:srgbClr val="CBD5E1"/>
-                </a:solidFill>
-                <a:latin typeface="Outfit"/>
-                <a:ea typeface="Outfit"/>
-                <a:cs typeface="Outfit"/>
-                <a:sym typeface="Outfit"/>
-              </a:rPr>
-              <a:t>https://static.vecteezy.com/system/resources/previews/059/447/435/non_2x/hacker-silhouette-illustration-cyber-security-digital-crime-concept-vector.jpg</a:t>
-            </a:r>
-            <a:endParaRPr/>
-          </a:p>
-        </p:txBody>
-      </p:sp>
-      <p:sp>
-        <p:nvSpPr>
-          <p:cNvPr id="290" name="Google Shape;290;p25"/>
-          <p:cNvSpPr txBox="1"/>
-          <p:nvPr/>
-        </p:nvSpPr>
-        <p:spPr>
-          <a:xfrm>
-            <a:off x="1676400" y="3741390"/>
-            <a:ext cx="9934575" cy="243780"/>
-          </a:xfrm>
-          <a:prstGeom prst="rect">
-            <a:avLst/>
-          </a:prstGeom>
-          <a:noFill/>
-          <a:ln>
-            <a:noFill/>
-          </a:ln>
-        </p:spPr>
-        <p:txBody>
-          <a:bodyPr spcFirstLastPara="1" wrap="square" lIns="0" tIns="0" rIns="0" bIns="0" anchor="t" anchorCtr="0">
-            <a:spAutoFit/>
-          </a:bodyPr>
-          <a:lstStyle/>
-          <a:p>
-            <a:pPr marL="0" marR="0" lvl="0" indent="0" algn="l" rtl="0">
-              <a:lnSpc>
-                <a:spcPct val="160000"/>
-              </a:lnSpc>
-              <a:spcBef>
-                <a:spcPts val="0"/>
-              </a:spcBef>
-              <a:spcAft>
-                <a:spcPts val="0"/>
-              </a:spcAft>
-              <a:buNone/>
-            </a:pPr>
-            <a:r>
-              <a:rPr lang="en-US" sz="1200" b="0" i="0" u="none" strike="noStrike" cap="none">
-                <a:solidFill>
-                  <a:srgbClr val="CBD5E1"/>
-                </a:solidFill>
-                <a:latin typeface="Outfit"/>
-                <a:ea typeface="Outfit"/>
-                <a:cs typeface="Outfit"/>
-                <a:sym typeface="Outfit"/>
-              </a:rPr>
-              <a:t>Source: </a:t>
-            </a:r>
-            <a:r>
-              <a:rPr lang="en-US" sz="1200" b="0" i="0" u="none" strike="noStrike" cap="none">
-                <a:solidFill>
-                  <a:srgbClr val="4F46E5"/>
-                </a:solidFill>
-                <a:latin typeface="Outfit"/>
-                <a:ea typeface="Outfit"/>
-                <a:cs typeface="Outfit"/>
-                <a:sym typeface="Outfit"/>
-              </a:rPr>
-              <a:t>www.vecteezy.com</a:t>
-            </a:r>
-            <a:endParaRPr/>
-          </a:p>
-        </p:txBody>
-      </p:sp>
-      <p:pic>
-        <p:nvPicPr>
-          <p:cNvPr id="291" name="Google Shape;291;p25" descr="image.png"/>
-          <p:cNvPicPr preferRelativeResize="0"/>
-          <p:nvPr/>
-        </p:nvPicPr>
-        <p:blipFill rotWithShape="1">
-          <a:blip r:embed="rId6">
-            <a:alphaModFix/>
-          </a:blip>
-          <a:srcRect/>
-          <a:stretch/>
-        </p:blipFill>
-        <p:spPr>
-          <a:xfrm>
-            <a:off x="581025" y="4386113"/>
-            <a:ext cx="857250" cy="476250"/>
-          </a:xfrm>
-          <a:prstGeom prst="rect">
-            <a:avLst/>
-          </a:prstGeom>
-          <a:noFill/>
-          <a:ln>
-            <a:noFill/>
-          </a:ln>
-        </p:spPr>
-      </p:pic>
-      <p:sp>
-        <p:nvSpPr>
-          <p:cNvPr id="292" name="Google Shape;292;p25"/>
-          <p:cNvSpPr txBox="1"/>
-          <p:nvPr/>
-        </p:nvSpPr>
-        <p:spPr>
-          <a:xfrm>
-            <a:off x="1676400" y="4280445"/>
-            <a:ext cx="9934575" cy="396180"/>
-          </a:xfrm>
-          <a:prstGeom prst="rect">
-            <a:avLst/>
-          </a:prstGeom>
-          <a:noFill/>
-          <a:ln>
-            <a:noFill/>
-          </a:ln>
-        </p:spPr>
-        <p:txBody>
-          <a:bodyPr spcFirstLastPara="1" wrap="square" lIns="0" tIns="0" rIns="0" bIns="0" anchor="t" anchorCtr="0">
-            <a:spAutoFit/>
-          </a:bodyPr>
-          <a:lstStyle/>
-          <a:p>
-            <a:pPr marL="0" marR="0" lvl="0" indent="0" algn="l" rtl="0">
-              <a:lnSpc>
-                <a:spcPct val="160000"/>
-              </a:lnSpc>
-              <a:spcBef>
-                <a:spcPts val="0"/>
-              </a:spcBef>
-              <a:spcAft>
-                <a:spcPts val="0"/>
-              </a:spcAft>
-              <a:buNone/>
-            </a:pPr>
-            <a:r>
-              <a:rPr lang="en-US" sz="975" b="0" i="0" u="none" strike="noStrike" cap="none">
-                <a:solidFill>
-                  <a:srgbClr val="CBD5E1"/>
-                </a:solidFill>
-                <a:latin typeface="Outfit"/>
-                <a:ea typeface="Outfit"/>
-                <a:cs typeface="Outfit"/>
-                <a:sym typeface="Outfit"/>
-              </a:rPr>
-              <a:t>https://img.freepik.com/premium-photo/facial-recognition-scanning-smartphone-digital-identity-biometric-technology-futuristic-security-artificial-intelligence-face-scan-interface-mobile-authentication_72482-15163.jpg</a:t>
-            </a:r>
-            <a:endParaRPr/>
-          </a:p>
-        </p:txBody>
-      </p:sp>
-      <p:sp>
-        <p:nvSpPr>
-          <p:cNvPr id="293" name="Google Shape;293;p25"/>
-          <p:cNvSpPr txBox="1"/>
-          <p:nvPr/>
-        </p:nvSpPr>
-        <p:spPr>
-          <a:xfrm>
-            <a:off x="1676400" y="4724251"/>
-            <a:ext cx="9934575" cy="243780"/>
-          </a:xfrm>
-          <a:prstGeom prst="rect">
-            <a:avLst/>
-          </a:prstGeom>
-          <a:noFill/>
-          <a:ln>
-            <a:noFill/>
-          </a:ln>
-        </p:spPr>
-        <p:txBody>
-          <a:bodyPr spcFirstLastPara="1" wrap="square" lIns="0" tIns="0" rIns="0" bIns="0" anchor="t" anchorCtr="0">
-            <a:spAutoFit/>
-          </a:bodyPr>
-          <a:lstStyle/>
-          <a:p>
-            <a:pPr marL="0" marR="0" lvl="0" indent="0" algn="l" rtl="0">
-              <a:lnSpc>
-                <a:spcPct val="160000"/>
-              </a:lnSpc>
-              <a:spcBef>
-                <a:spcPts val="0"/>
-              </a:spcBef>
-              <a:spcAft>
-                <a:spcPts val="0"/>
-              </a:spcAft>
-              <a:buNone/>
-            </a:pPr>
-            <a:r>
-              <a:rPr lang="en-US" sz="1200" b="0" i="0" u="none" strike="noStrike" cap="none">
-                <a:solidFill>
-                  <a:srgbClr val="CBD5E1"/>
-                </a:solidFill>
-                <a:latin typeface="Outfit"/>
-                <a:ea typeface="Outfit"/>
-                <a:cs typeface="Outfit"/>
-                <a:sym typeface="Outfit"/>
-              </a:rPr>
-              <a:t>Source: </a:t>
-            </a:r>
-            <a:r>
-              <a:rPr lang="en-US" sz="1200" b="0" i="0" u="none" strike="noStrike" cap="none">
-                <a:solidFill>
-                  <a:srgbClr val="4F46E5"/>
-                </a:solidFill>
-                <a:latin typeface="Outfit"/>
-                <a:ea typeface="Outfit"/>
-                <a:cs typeface="Outfit"/>
-                <a:sym typeface="Outfit"/>
-              </a:rPr>
-              <a:t>www.freepik.com</a:t>
-            </a:r>
-            <a:endParaRPr/>
-          </a:p>
-        </p:txBody>
-      </p:sp>
-      <p:sp>
-        <p:nvSpPr>
-          <p:cNvPr id="294" name="Google Shape;294;p25"/>
-          <p:cNvSpPr txBox="1"/>
-          <p:nvPr/>
-        </p:nvSpPr>
-        <p:spPr>
-          <a:xfrm>
-            <a:off x="771525" y="581025"/>
-            <a:ext cx="11381422" cy="439935"/>
-          </a:xfrm>
-          <a:prstGeom prst="rect">
-            <a:avLst/>
-          </a:prstGeom>
-          <a:noFill/>
-          <a:ln>
-            <a:noFill/>
-          </a:ln>
-        </p:spPr>
-        <p:txBody>
-          <a:bodyPr spcFirstLastPara="1" wrap="square" lIns="0" tIns="0" rIns="0" bIns="0" anchor="t" anchorCtr="0">
-            <a:spAutoFit/>
-          </a:bodyPr>
-          <a:lstStyle/>
-          <a:p>
-            <a:pPr marL="0" marR="0" lvl="0" indent="0" algn="l" rtl="0">
-              <a:lnSpc>
-                <a:spcPct val="110000"/>
-              </a:lnSpc>
-              <a:spcBef>
-                <a:spcPts val="0"/>
-              </a:spcBef>
-              <a:spcAft>
-                <a:spcPts val="0"/>
-              </a:spcAft>
-              <a:buNone/>
-            </a:pPr>
-            <a:r>
-              <a:rPr lang="en-US" sz="3150" b="1" i="0" u="none" strike="noStrike" cap="none">
-                <a:solidFill>
-                  <a:srgbClr val="F8FAFC"/>
-                </a:solidFill>
-                <a:latin typeface="Space Grotesk"/>
-                <a:ea typeface="Space Grotesk"/>
-                <a:cs typeface="Space Grotesk"/>
-                <a:sym typeface="Space Grotesk"/>
-              </a:rPr>
-              <a:t>Image Sources</a:t>
-            </a:r>
-            <a:endParaRPr/>
-          </a:p>
-        </p:txBody>
-      </p:sp>
-      <p:sp>
-        <p:nvSpPr>
-          <p:cNvPr id="295" name="Google Shape;295;p25"/>
-          <p:cNvSpPr/>
-          <p:nvPr/>
-        </p:nvSpPr>
-        <p:spPr>
-          <a:xfrm>
-            <a:off x="581025" y="581025"/>
-            <a:ext cx="47625" cy="439935"/>
-          </a:xfrm>
-          <a:prstGeom prst="rect">
-            <a:avLst/>
-          </a:prstGeom>
-          <a:solidFill>
-            <a:srgbClr val="38BDF8"/>
-          </a:solidFill>
-          <a:ln>
-            <a:noFill/>
-          </a:ln>
-        </p:spPr>
-        <p:txBody>
-          <a:bodyPr spcFirstLastPara="1" wrap="square" lIns="91425" tIns="45700" rIns="91425" bIns="45700" anchor="ctr" anchorCtr="0">
-            <a:noAutofit/>
-          </a:bodyPr>
-          <a:lstStyle/>
-          <a:p>
-            <a:pPr marL="0" marR="0" lvl="0" indent="0" algn="ctr" rtl="0">
-              <a:spcBef>
-                <a:spcPts val="0"/>
-              </a:spcBef>
-              <a:spcAft>
-                <a:spcPts val="0"/>
-              </a:spcAft>
-              <a:buNone/>
-            </a:pPr>
-            <a:endParaRPr sz="1800" b="0" i="0" u="none" strike="noStrike" cap="none">
-              <a:solidFill>
-                <a:schemeClr val="dk1"/>
-              </a:solidFill>
-              <a:latin typeface="Calibri"/>
-              <a:ea typeface="Calibri"/>
-              <a:cs typeface="Calibri"/>
-              <a:sym typeface="Calibri"/>
-            </a:endParaRPr>
-          </a:p>
-        </p:txBody>
-      </p:sp>
-    </p:spTree>
-  </p:cSld>
-  <p:clrMapOvr>
-    <a:masterClrMapping/>
-  </p:clrMapOvr>
-</p:sld>
-</file>
-
 <file path=ppt/slides/slide2.xml><?xml version="1.0" encoding="utf-8"?>
 <p:sld xmlns:a="http://schemas.openxmlformats.org/drawingml/2006/main" xmlns:r="http://schemas.openxmlformats.org/officeDocument/2006/relationships" xmlns:p="http://schemas.openxmlformats.org/presentationml/2006/main">
   <p:cSld>
@@ -16341,7 +15364,7 @@
         <p:spPr>
           <a:xfrm>
             <a:off x="581025" y="2862113"/>
-            <a:ext cx="5229225" cy="609600"/>
+            <a:ext cx="5229225" cy="738664"/>
           </a:xfrm>
           <a:prstGeom prst="rect">
             <a:avLst/>
@@ -16370,7 +15393,7 @@
               <a:buNone/>
             </a:pPr>
             <a:r>
-              <a:rPr lang="en-US" sz="1500" b="1" i="0" u="none" strike="noStrike" cap="none">
+              <a:rPr lang="en-US" sz="1500" i="0" u="none" strike="noStrike" cap="none" dirty="0" err="1">
                 <a:solidFill>
                   <a:srgbClr val="CBD5E1"/>
                 </a:solidFill>
@@ -16379,10 +15402,10 @@
                 <a:cs typeface="Outfit"/>
                 <a:sym typeface="Outfit"/>
               </a:rPr>
-              <a:t>Transitoriedade:</a:t>
-            </a:r>
-            <a:r>
-              <a:rPr lang="en-US" sz="1500" b="0" i="0" u="none" strike="noStrike" cap="none">
+              <a:t>T</a:t>
+            </a:r>
+            <a:r>
+              <a:rPr lang="en-US" sz="1500" b="1" i="0" u="none" strike="noStrike" cap="none" dirty="0" err="1">
                 <a:solidFill>
                   <a:srgbClr val="CBD5E1"/>
                 </a:solidFill>
@@ -16391,9 +15414,177 @@
                 <a:cs typeface="Outfit"/>
                 <a:sym typeface="Outfit"/>
               </a:rPr>
-              <a:t> Válido apenas para uma sessão de login ou transação.</a:t>
-            </a:r>
-            <a:endParaRPr/>
+              <a:t>ransitoriedade</a:t>
+            </a:r>
+            <a:r>
+              <a:rPr lang="en-US" sz="1500" b="1" i="0" u="none" strike="noStrike" cap="none" dirty="0">
+                <a:solidFill>
+                  <a:srgbClr val="CBD5E1"/>
+                </a:solidFill>
+                <a:latin typeface="Outfit"/>
+                <a:ea typeface="Outfit"/>
+                <a:cs typeface="Outfit"/>
+                <a:sym typeface="Outfit"/>
+              </a:rPr>
+              <a:t>:</a:t>
+            </a:r>
+            <a:r>
+              <a:rPr lang="en-US" sz="1500" b="0" i="0" u="none" strike="noStrike" cap="none" dirty="0">
+                <a:solidFill>
+                  <a:srgbClr val="CBD5E1"/>
+                </a:solidFill>
+                <a:latin typeface="Outfit"/>
+                <a:ea typeface="Outfit"/>
+                <a:cs typeface="Outfit"/>
+                <a:sym typeface="Outfit"/>
+              </a:rPr>
+              <a:t> </a:t>
+            </a:r>
+            <a:r>
+              <a:rPr lang="en-US" sz="1500" b="0" i="0" u="none" strike="noStrike" cap="none" dirty="0" err="1">
+                <a:solidFill>
+                  <a:srgbClr val="CBD5E1"/>
+                </a:solidFill>
+                <a:latin typeface="Outfit"/>
+                <a:ea typeface="Outfit"/>
+                <a:cs typeface="Outfit"/>
+                <a:sym typeface="Outfit"/>
+              </a:rPr>
+              <a:t>Válido</a:t>
+            </a:r>
+            <a:r>
+              <a:rPr lang="en-US" sz="1500" b="0" i="0" u="none" strike="noStrike" cap="none" dirty="0">
+                <a:solidFill>
+                  <a:srgbClr val="CBD5E1"/>
+                </a:solidFill>
+                <a:latin typeface="Outfit"/>
+                <a:ea typeface="Outfit"/>
+                <a:cs typeface="Outfit"/>
+                <a:sym typeface="Outfit"/>
+              </a:rPr>
+              <a:t> </a:t>
+            </a:r>
+            <a:r>
+              <a:rPr lang="en-US" sz="1500" b="0" i="0" u="none" strike="noStrike" cap="none" dirty="0" err="1">
+                <a:solidFill>
+                  <a:srgbClr val="CBD5E1"/>
+                </a:solidFill>
+                <a:latin typeface="Outfit"/>
+                <a:ea typeface="Outfit"/>
+                <a:cs typeface="Outfit"/>
+                <a:sym typeface="Outfit"/>
+              </a:rPr>
+              <a:t>apenas</a:t>
+            </a:r>
+            <a:r>
+              <a:rPr lang="en-US" sz="1500" b="0" i="0" u="none" strike="noStrike" cap="none" dirty="0">
+                <a:solidFill>
+                  <a:srgbClr val="CBD5E1"/>
+                </a:solidFill>
+                <a:latin typeface="Outfit"/>
+                <a:ea typeface="Outfit"/>
+                <a:cs typeface="Outfit"/>
+                <a:sym typeface="Outfit"/>
+              </a:rPr>
+              <a:t> para </a:t>
+            </a:r>
+            <a:r>
+              <a:rPr lang="en-US" sz="1500" b="0" i="0" u="none" strike="noStrike" cap="none" dirty="0" err="1">
+                <a:solidFill>
+                  <a:srgbClr val="CBD5E1"/>
+                </a:solidFill>
+                <a:latin typeface="Outfit"/>
+                <a:ea typeface="Outfit"/>
+                <a:cs typeface="Outfit"/>
+                <a:sym typeface="Outfit"/>
+              </a:rPr>
+              <a:t>uma</a:t>
+            </a:r>
+            <a:r>
+              <a:rPr lang="en-US" sz="1500" b="0" i="0" u="none" strike="noStrike" cap="none" dirty="0">
+                <a:solidFill>
+                  <a:srgbClr val="CBD5E1"/>
+                </a:solidFill>
+                <a:latin typeface="Outfit"/>
+                <a:ea typeface="Outfit"/>
+                <a:cs typeface="Outfit"/>
+                <a:sym typeface="Outfit"/>
+              </a:rPr>
+              <a:t> </a:t>
+            </a:r>
+            <a:r>
+              <a:rPr lang="en-US" sz="1500" b="0" i="0" u="none" strike="noStrike" cap="none" dirty="0" err="1">
+                <a:solidFill>
+                  <a:srgbClr val="CBD5E1"/>
+                </a:solidFill>
+                <a:latin typeface="Outfit"/>
+                <a:ea typeface="Outfit"/>
+                <a:cs typeface="Outfit"/>
+                <a:sym typeface="Outfit"/>
+              </a:rPr>
+              <a:t>sessão</a:t>
+            </a:r>
+            <a:r>
+              <a:rPr lang="en-US" sz="1500" b="0" i="0" u="none" strike="noStrike" cap="none" dirty="0">
+                <a:solidFill>
+                  <a:srgbClr val="CBD5E1"/>
+                </a:solidFill>
+                <a:latin typeface="Outfit"/>
+                <a:ea typeface="Outfit"/>
+                <a:cs typeface="Outfit"/>
+                <a:sym typeface="Outfit"/>
+              </a:rPr>
+              <a:t> de login </a:t>
+            </a:r>
+            <a:r>
+              <a:rPr lang="en-US" sz="1500" b="0" i="0" u="none" strike="noStrike" cap="none" dirty="0" err="1">
+                <a:solidFill>
+                  <a:srgbClr val="CBD5E1"/>
+                </a:solidFill>
+                <a:latin typeface="Outfit"/>
+                <a:ea typeface="Outfit"/>
+                <a:cs typeface="Outfit"/>
+                <a:sym typeface="Outfit"/>
+              </a:rPr>
+              <a:t>ou</a:t>
+            </a:r>
+            <a:r>
+              <a:rPr lang="en-US" sz="1500" b="0" i="0" u="none" strike="noStrike" cap="none" dirty="0">
+                <a:solidFill>
+                  <a:srgbClr val="CBD5E1"/>
+                </a:solidFill>
+                <a:latin typeface="Outfit"/>
+                <a:ea typeface="Outfit"/>
+                <a:cs typeface="Outfit"/>
+                <a:sym typeface="Outfit"/>
+              </a:rPr>
+              <a:t> </a:t>
+            </a:r>
+            <a:r>
+              <a:rPr lang="en-US" sz="1500" b="0" i="0" u="none" strike="noStrike" cap="none" dirty="0" err="1">
+                <a:solidFill>
+                  <a:srgbClr val="CBD5E1"/>
+                </a:solidFill>
+                <a:latin typeface="Outfit"/>
+                <a:ea typeface="Outfit"/>
+                <a:cs typeface="Outfit"/>
+                <a:sym typeface="Outfit"/>
+              </a:rPr>
+              <a:t>transação</a:t>
+            </a:r>
+            <a:r>
+              <a:rPr lang="en-US" sz="1500" b="0" i="0" u="none" strike="noStrike" cap="none" dirty="0">
+                <a:solidFill>
+                  <a:srgbClr val="CBD5E1"/>
+                </a:solidFill>
+                <a:latin typeface="Outfit"/>
+                <a:ea typeface="Outfit"/>
+                <a:cs typeface="Outfit"/>
+                <a:sym typeface="Outfit"/>
+              </a:rPr>
+              <a:t>.</a:t>
+            </a:r>
+            <a:endParaRPr dirty="0"/>
           </a:p>
         </p:txBody>
       </p:sp>
@@ -16406,7 +15597,7 @@
         <p:spPr>
           <a:xfrm>
             <a:off x="581025" y="3662213"/>
-            <a:ext cx="5229225" cy="609600"/>
+            <a:ext cx="5229225" cy="738664"/>
           </a:xfrm>
           <a:prstGeom prst="rect">
             <a:avLst/>
@@ -16435,7 +15626,7 @@
               <a:buNone/>
             </a:pPr>
             <a:r>
-              <a:rPr lang="en-US" sz="1500" b="1" i="0" u="none" strike="noStrike" cap="none">
+              <a:rPr lang="en-US" sz="1500" b="1" i="0" u="none" strike="noStrike" cap="none" dirty="0">
                 <a:solidFill>
                   <a:srgbClr val="CBD5E1"/>
                 </a:solidFill>
@@ -16444,10 +15635,10 @@
                 <a:cs typeface="Outfit"/>
                 <a:sym typeface="Outfit"/>
               </a:rPr>
-              <a:t>Janela Temporal:</a:t>
-            </a:r>
-            <a:r>
-              <a:rPr lang="en-US" sz="1500" b="0" i="0" u="none" strike="noStrike" cap="none">
+              <a:t>Janela </a:t>
+            </a:r>
+            <a:r>
+              <a:rPr lang="en-US" sz="1500" b="1" i="0" u="none" strike="noStrike" cap="none" dirty="0" err="1">
                 <a:solidFill>
                   <a:srgbClr val="CBD5E1"/>
                 </a:solidFill>
@@ -16456,9 +15647,177 @@
                 <a:cs typeface="Outfit"/>
                 <a:sym typeface="Outfit"/>
               </a:rPr>
-              <a:t> Expira rapidamente, mitigando riscos de interceção passiva.</a:t>
-            </a:r>
-            <a:endParaRPr/>
+              <a:t>emporal</a:t>
+            </a:r>
+            <a:r>
+              <a:rPr lang="en-US" sz="1500" b="1" i="0" u="none" strike="noStrike" cap="none" dirty="0">
+                <a:solidFill>
+                  <a:srgbClr val="CBD5E1"/>
+                </a:solidFill>
+                <a:latin typeface="Outfit"/>
+                <a:ea typeface="Outfit"/>
+                <a:cs typeface="Outfit"/>
+                <a:sym typeface="Outfit"/>
+              </a:rPr>
+              <a:t>:</a:t>
+            </a:r>
+            <a:r>
+              <a:rPr lang="en-US" sz="1500" b="0" i="0" u="none" strike="noStrike" cap="none" dirty="0">
+                <a:solidFill>
+                  <a:srgbClr val="CBD5E1"/>
+                </a:solidFill>
+                <a:latin typeface="Outfit"/>
+                <a:ea typeface="Outfit"/>
+                <a:cs typeface="Outfit"/>
+                <a:sym typeface="Outfit"/>
+              </a:rPr>
+              <a:t> </a:t>
+            </a:r>
+            <a:r>
+              <a:rPr lang="en-US" sz="1500" b="0" i="0" u="none" strike="noStrike" cap="none" dirty="0" err="1">
+                <a:solidFill>
+                  <a:srgbClr val="CBD5E1"/>
+                </a:solidFill>
+                <a:latin typeface="Outfit"/>
+                <a:ea typeface="Outfit"/>
+                <a:cs typeface="Outfit"/>
+                <a:sym typeface="Outfit"/>
+              </a:rPr>
+              <a:t>Expira</a:t>
+            </a:r>
+            <a:r>
+              <a:rPr lang="en-US" sz="1500" b="0" i="0" u="none" strike="noStrike" cap="none" dirty="0">
+                <a:solidFill>
+                  <a:srgbClr val="CBD5E1"/>
+                </a:solidFill>
+                <a:latin typeface="Outfit"/>
+                <a:ea typeface="Outfit"/>
+                <a:cs typeface="Outfit"/>
+                <a:sym typeface="Outfit"/>
+              </a:rPr>
+              <a:t> </a:t>
+            </a:r>
+            <a:r>
+              <a:rPr lang="en-US" sz="1500" b="0" i="0" u="none" strike="noStrike" cap="none" dirty="0" err="1">
+                <a:solidFill>
+                  <a:srgbClr val="CBD5E1"/>
+                </a:solidFill>
+                <a:latin typeface="Outfit"/>
+                <a:ea typeface="Outfit"/>
+                <a:cs typeface="Outfit"/>
+                <a:sym typeface="Outfit"/>
+              </a:rPr>
+              <a:t>rapidamente</a:t>
+            </a:r>
+            <a:r>
+              <a:rPr lang="en-US" sz="1500" b="0" i="0" u="none" strike="noStrike" cap="none" dirty="0">
+                <a:solidFill>
+                  <a:srgbClr val="CBD5E1"/>
+                </a:solidFill>
+                <a:latin typeface="Outfit"/>
+                <a:ea typeface="Outfit"/>
+                <a:cs typeface="Outfit"/>
+                <a:sym typeface="Outfit"/>
+              </a:rPr>
+              <a:t>, </a:t>
+            </a:r>
+            <a:r>
+              <a:rPr lang="en-US" sz="1500" b="0" i="0" u="none" strike="noStrike" cap="none" dirty="0" err="1">
+                <a:solidFill>
+                  <a:srgbClr val="CBD5E1"/>
+                </a:solidFill>
+                <a:latin typeface="Outfit"/>
+                <a:ea typeface="Outfit"/>
+                <a:cs typeface="Outfit"/>
+                <a:sym typeface="Outfit"/>
+              </a:rPr>
+              <a:t>mitigando</a:t>
+            </a:r>
+            <a:r>
+              <a:rPr lang="en-US" sz="1500" b="0" i="0" u="none" strike="noStrike" cap="none" dirty="0">
+                <a:solidFill>
+                  <a:srgbClr val="CBD5E1"/>
+                </a:solidFill>
+                <a:latin typeface="Outfit"/>
+                <a:ea typeface="Outfit"/>
+                <a:cs typeface="Outfit"/>
+                <a:sym typeface="Outfit"/>
+              </a:rPr>
+              <a:t> </a:t>
+            </a:r>
+            <a:r>
+              <a:rPr lang="en-US" sz="1500" b="0" i="0" u="none" strike="noStrike" cap="none" dirty="0" err="1">
+                <a:solidFill>
+                  <a:srgbClr val="CBD5E1"/>
+                </a:solidFill>
+                <a:latin typeface="Outfit"/>
+                <a:ea typeface="Outfit"/>
+                <a:cs typeface="Outfit"/>
+                <a:sym typeface="Outfit"/>
+              </a:rPr>
+              <a:t>riscos</a:t>
+            </a:r>
+            <a:r>
+              <a:rPr lang="en-US" sz="1500" b="0" i="0" u="none" strike="noStrike" cap="none" dirty="0">
+                <a:solidFill>
+                  <a:srgbClr val="CBD5E1"/>
+                </a:solidFill>
+                <a:latin typeface="Outfit"/>
+                <a:ea typeface="Outfit"/>
+                <a:cs typeface="Outfit"/>
+                <a:sym typeface="Outfit"/>
+              </a:rPr>
+              <a:t> de </a:t>
+            </a:r>
+            <a:r>
+              <a:rPr lang="en-US" sz="1500" b="0" i="0" u="none" strike="noStrike" cap="none" dirty="0" err="1">
+                <a:solidFill>
+                  <a:srgbClr val="CBD5E1"/>
+                </a:solidFill>
+                <a:latin typeface="Outfit"/>
+                <a:ea typeface="Outfit"/>
+                <a:cs typeface="Outfit"/>
+                <a:sym typeface="Outfit"/>
+              </a:rPr>
+              <a:t>interceção</a:t>
+            </a:r>
+            <a:r>
+              <a:rPr lang="en-US" sz="1500" b="0" i="0" u="none" strike="noStrike" cap="none" dirty="0">
+                <a:solidFill>
+                  <a:srgbClr val="CBD5E1"/>
+                </a:solidFill>
+                <a:latin typeface="Outfit"/>
+                <a:ea typeface="Outfit"/>
+                <a:cs typeface="Outfit"/>
+                <a:sym typeface="Outfit"/>
+              </a:rPr>
+              <a:t> </a:t>
+            </a:r>
+            <a:r>
+              <a:rPr lang="en-US" sz="1500" b="0" i="0" u="none" strike="noStrike" cap="none" dirty="0" err="1">
+                <a:solidFill>
+                  <a:srgbClr val="CBD5E1"/>
+                </a:solidFill>
+                <a:latin typeface="Outfit"/>
+                <a:ea typeface="Outfit"/>
+                <a:cs typeface="Outfit"/>
+                <a:sym typeface="Outfit"/>
+              </a:rPr>
+              <a:t>passiva</a:t>
+            </a:r>
+            <a:r>
+              <a:rPr lang="en-US" sz="1500" b="0" i="0" u="none" strike="noStrike" cap="none" dirty="0">
+                <a:solidFill>
+                  <a:srgbClr val="CBD5E1"/>
+                </a:solidFill>
+                <a:latin typeface="Outfit"/>
+                <a:ea typeface="Outfit"/>
+                <a:cs typeface="Outfit"/>
+                <a:sym typeface="Outfit"/>
+              </a:rPr>
+              <a:t>.</a:t>
+            </a:r>
+            <a:endParaRPr dirty="0"/>
           </a:p>
         </p:txBody>
       </p:sp>
@@ -20864,8 +20223,8 @@
         </p:blipFill>
         <p:spPr>
           <a:xfrm>
-            <a:off x="6096000" y="9525"/>
-            <a:ext cx="6086475" cy="6838950"/>
+            <a:off x="5973098" y="9524"/>
+            <a:ext cx="6299828" cy="6857999"/>
           </a:xfrm>
           <a:prstGeom prst="rect">
             <a:avLst/>
